--- a/kizashi-app/submission/presentation.pptx
+++ b/kizashi-app/submission/presentation.pptx
@@ -2507,6 +2507,10 @@
             </a:outerShdw>
           </a:effectLst>
         </p:spPr>
+        <p:txBody>
+          <a:bodyPr/>
+          <a:p/>
+        </p:txBody>
       </p:sp>
       <p:sp>
         <p:nvSpPr>
@@ -2611,6 +2615,10 @@
             </a:outerShdw>
           </a:effectLst>
         </p:spPr>
+        <p:txBody>
+          <a:bodyPr/>
+          <a:p/>
+        </p:txBody>
       </p:sp>
       <p:sp>
         <p:nvSpPr>
@@ -2702,6 +2710,10 @@
             </a:outerShdw>
           </a:effectLst>
         </p:spPr>
+        <p:txBody>
+          <a:bodyPr/>
+          <a:p/>
+        </p:txBody>
       </p:sp>
       <p:sp>
         <p:nvSpPr>
@@ -2922,7 +2934,7 @@
                 <a:ea typeface="Calibri" pitchFamily="34" charset="-122"/>
                 <a:cs typeface="Calibri" pitchFamily="34" charset="-120"/>
               </a:rPr>
-              <a:t>対象データは東京都のオープンデータ（国土数値情報・国土地理院）を活用。Cloudflare Workers + D1で構築、完全無料で運用。</a:t>
+              <a:t>対象データは東京都建設局河川部のオープンデータ（CC BY 4.0）を活用。Cloudflare Workers + D1で構築、完全無料で運用。</a:t>
             </a:r>
             <a:endParaRPr lang="en-US" sz="1200" dirty="0"/>
           </a:p>
@@ -3062,6 +3074,10 @@
             <a:prstDash val="solid"/>
           </a:ln>
         </p:spPr>
+        <p:txBody>
+          <a:bodyPr/>
+          <a:p/>
+        </p:txBody>
       </p:sp>
       <p:sp>
         <p:nvSpPr>
@@ -3204,6 +3220,10 @@
             <a:prstDash val="solid"/>
           </a:ln>
         </p:spPr>
+        <p:txBody>
+          <a:bodyPr/>
+          <a:p/>
+        </p:txBody>
       </p:sp>
       <p:sp>
         <p:nvSpPr>
@@ -3346,6 +3366,10 @@
             <a:prstDash val="solid"/>
           </a:ln>
         </p:spPr>
+        <p:txBody>
+          <a:bodyPr/>
+          <a:p/>
+        </p:txBody>
       </p:sp>
       <p:sp>
         <p:nvSpPr>
@@ -3488,6 +3512,10 @@
             <a:prstDash val="solid"/>
           </a:ln>
         </p:spPr>
+        <p:txBody>
+          <a:bodyPr/>
+          <a:p/>
+        </p:txBody>
       </p:sp>
       <p:sp>
         <p:nvSpPr>
@@ -3600,7 +3628,7 @@
                 <a:ea typeface="Calibri" pitchFamily="34" charset="-122"/>
                 <a:cs typeface="Calibri" pitchFamily="34" charset="-120"/>
               </a:rPr>
-              <a:t>国交省公式チェックリストに基づく目撃情報をワンタップで共有</a:t>
+              <a:t>公式チェックリストに基づく目撃情報をワンタップで共有</a:t>
             </a:r>
             <a:endParaRPr lang="en-US" sz="1100" dirty="0"/>
           </a:p>
@@ -3639,6 +3667,10 @@
             </a:outerShdw>
           </a:effectLst>
         </p:spPr>
+        <p:txBody>
+          <a:bodyPr/>
+          <a:p/>
+        </p:txBody>
       </p:sp>
       <p:pic>
         <p:nvPicPr>
@@ -3888,6 +3920,10 @@
             </a:outerShdw>
           </a:effectLst>
         </p:spPr>
+        <p:txBody>
+          <a:bodyPr/>
+          <a:p/>
+        </p:txBody>
       </p:sp>
       <p:pic>
         <p:nvPicPr>
@@ -4027,6 +4063,10 @@
             </a:outerShdw>
           </a:effectLst>
         </p:spPr>
+        <p:txBody>
+          <a:bodyPr/>
+          <a:p/>
+        </p:txBody>
       </p:sp>
       <p:pic>
         <p:nvPicPr>
@@ -4085,7 +4125,7 @@
                 <a:ea typeface="Calibri" pitchFamily="34" charset="-122"/>
                 <a:cs typeface="Calibri" pitchFamily="34" charset="-120"/>
               </a:rPr>
-              <a:t>💬 そっと話す（傾聴AIチャット）</a:t>
+              <a:t>💬 AI相談（傾聴AIチャット）</a:t>
             </a:r>
             <a:endParaRPr lang="en-US" sz="1150" dirty="0"/>
           </a:p>
@@ -4568,7 +4608,7 @@
                           <a:ea typeface="Calibri" pitchFamily="34" charset="-122"/>
                           <a:cs typeface="Calibri" pitchFamily="34" charset="-120"/>
                         </a:rPr>
-                        <a:t>国土数値情報「土砂災害警戒区域データ」（国土交通省）</a:t>
+                        <a:t>東京都建設局河川部「東京都土砂災害危険度情報関連データ」（CC BY 4.0）</a:t>
                       </a:r>
                       <a:endParaRPr lang="en-US" sz="1300" dirty="0">
                         <a:latin typeface="Calibri" charset="0"/>
@@ -4636,283 +4676,7 @@
                           <a:ea typeface="Calibri" pitchFamily="34" charset="-122"/>
                           <a:cs typeface="Calibri" pitchFamily="34" charset="-120"/>
                         </a:rPr>
-                        <a:t>危険エリア・待機可能エリアの地図表示</a:t>
-                      </a:r>
-                      <a:endParaRPr lang="en-US" sz="1300" dirty="0">
-                        <a:latin typeface="Calibri" charset="0"/>
-                        <a:ea typeface="Calibri" charset="0"/>
-                        <a:cs typeface="Calibri" charset="0"/>
-                      </a:endParaRPr>
-                    </a:p>
-                  </a:txBody>
-                  <a:tcPr marL="101600" marR="101600" marT="76200" marB="76200" anchor="ctr">
-                    <a:lnL w="6350" cap="flat" cmpd="sng" algn="ctr">
-                      <a:solidFill>
-                        <a:srgbClr val="DCDFDC"/>
-                      </a:solidFill>
-                      <a:prstDash val="solid"/>
-                      <a:round/>
-                      <a:headEnd type="none" w="med" len="med"/>
-                      <a:tailEnd type="none" w="med" len="med"/>
-                    </a:lnL>
-                    <a:lnR w="6350" cap="flat" cmpd="sng" algn="ctr">
-                      <a:solidFill>
-                        <a:srgbClr val="DCDFDC"/>
-                      </a:solidFill>
-                      <a:prstDash val="solid"/>
-                      <a:round/>
-                      <a:headEnd type="none" w="med" len="med"/>
-                      <a:tailEnd type="none" w="med" len="med"/>
-                    </a:lnR>
-                    <a:lnT w="6350" cap="flat" cmpd="sng" algn="ctr">
-                      <a:solidFill>
-                        <a:srgbClr val="DCDFDC"/>
-                      </a:solidFill>
-                      <a:prstDash val="solid"/>
-                      <a:round/>
-                      <a:headEnd type="none" w="med" len="med"/>
-                      <a:tailEnd type="none" w="med" len="med"/>
-                    </a:lnT>
-                    <a:lnB w="6350" cap="flat" cmpd="sng" algn="ctr">
-                      <a:solidFill>
-                        <a:srgbClr val="DCDFDC"/>
-                      </a:solidFill>
-                      <a:prstDash val="solid"/>
-                      <a:round/>
-                      <a:headEnd type="none" w="med" len="med"/>
-                      <a:tailEnd type="none" w="med" len="med"/>
-                    </a:lnB>
-                    <a:solidFill>
-                      <a:srgbClr val="F4F5F3"/>
-                    </a:solidFill>
-                  </a:tcPr>
-                </a:tc>
-              </a:tr>
-              <a:tr h="679269">
-                <a:tc>
-                  <a:txBody>
-                    <a:bodyPr/>
-                    <a:lstStyle/>
-                    <a:p>
-                      <a:pPr indent="0" marL="0">
-                        <a:buNone/>
-                      </a:pPr>
-                      <a:r>
-                        <a:rPr lang="en-US" sz="1300" dirty="0">
-                          <a:solidFill>
-                            <a:srgbClr val="1C2126"/>
-                          </a:solidFill>
-                          <a:latin typeface="Calibri" pitchFamily="34" charset="0"/>
-                          <a:ea typeface="Calibri" pitchFamily="34" charset="-122"/>
-                          <a:cs typeface="Calibri" pitchFamily="34" charset="-120"/>
-                        </a:rPr>
-                        <a:t>国土地理院タイル（標準地図）</a:t>
-                      </a:r>
-                      <a:endParaRPr lang="en-US" sz="1300" dirty="0">
-                        <a:latin typeface="Calibri" charset="0"/>
-                        <a:ea typeface="Calibri" charset="0"/>
-                        <a:cs typeface="Calibri" charset="0"/>
-                      </a:endParaRPr>
-                    </a:p>
-                  </a:txBody>
-                  <a:tcPr marL="101600" marR="101600" marT="76200" marB="76200" anchor="ctr">
-                    <a:lnL w="6350" cap="flat" cmpd="sng" algn="ctr">
-                      <a:solidFill>
-                        <a:srgbClr val="DCDFDC"/>
-                      </a:solidFill>
-                      <a:prstDash val="solid"/>
-                      <a:round/>
-                      <a:headEnd type="none" w="med" len="med"/>
-                      <a:tailEnd type="none" w="med" len="med"/>
-                    </a:lnL>
-                    <a:lnR w="6350" cap="flat" cmpd="sng" algn="ctr">
-                      <a:solidFill>
-                        <a:srgbClr val="DCDFDC"/>
-                      </a:solidFill>
-                      <a:prstDash val="solid"/>
-                      <a:round/>
-                      <a:headEnd type="none" w="med" len="med"/>
-                      <a:tailEnd type="none" w="med" len="med"/>
-                    </a:lnR>
-                    <a:lnT w="6350" cap="flat" cmpd="sng" algn="ctr">
-                      <a:solidFill>
-                        <a:srgbClr val="DCDFDC"/>
-                      </a:solidFill>
-                      <a:prstDash val="solid"/>
-                      <a:round/>
-                      <a:headEnd type="none" w="med" len="med"/>
-                      <a:tailEnd type="none" w="med" len="med"/>
-                    </a:lnT>
-                    <a:lnB w="6350" cap="flat" cmpd="sng" algn="ctr">
-                      <a:solidFill>
-                        <a:srgbClr val="DCDFDC"/>
-                      </a:solidFill>
-                      <a:prstDash val="solid"/>
-                      <a:round/>
-                      <a:headEnd type="none" w="med" len="med"/>
-                      <a:tailEnd type="none" w="med" len="med"/>
-                    </a:lnB>
-                    <a:solidFill>
-                      <a:srgbClr val="FFFFFF"/>
-                    </a:solidFill>
-                  </a:tcPr>
-                </a:tc>
-                <a:tc>
-                  <a:txBody>
-                    <a:bodyPr/>
-                    <a:lstStyle/>
-                    <a:p>
-                      <a:pPr indent="0" marL="0">
-                        <a:buNone/>
-                      </a:pPr>
-                      <a:r>
-                        <a:rPr lang="en-US" sz="1300" dirty="0">
-                          <a:solidFill>
-                            <a:srgbClr val="4B545C"/>
-                          </a:solidFill>
-                          <a:latin typeface="Calibri" pitchFamily="34" charset="0"/>
-                          <a:ea typeface="Calibri" pitchFamily="34" charset="-122"/>
-                          <a:cs typeface="Calibri" pitchFamily="34" charset="-120"/>
-                        </a:rPr>
-                        <a:t>地図の背景タイル表示</a:t>
-                      </a:r>
-                      <a:endParaRPr lang="en-US" sz="1300" dirty="0">
-                        <a:latin typeface="Calibri" charset="0"/>
-                        <a:ea typeface="Calibri" charset="0"/>
-                        <a:cs typeface="Calibri" charset="0"/>
-                      </a:endParaRPr>
-                    </a:p>
-                  </a:txBody>
-                  <a:tcPr marL="101600" marR="101600" marT="76200" marB="76200" anchor="ctr">
-                    <a:lnL w="6350" cap="flat" cmpd="sng" algn="ctr">
-                      <a:solidFill>
-                        <a:srgbClr val="DCDFDC"/>
-                      </a:solidFill>
-                      <a:prstDash val="solid"/>
-                      <a:round/>
-                      <a:headEnd type="none" w="med" len="med"/>
-                      <a:tailEnd type="none" w="med" len="med"/>
-                    </a:lnL>
-                    <a:lnR w="6350" cap="flat" cmpd="sng" algn="ctr">
-                      <a:solidFill>
-                        <a:srgbClr val="DCDFDC"/>
-                      </a:solidFill>
-                      <a:prstDash val="solid"/>
-                      <a:round/>
-                      <a:headEnd type="none" w="med" len="med"/>
-                      <a:tailEnd type="none" w="med" len="med"/>
-                    </a:lnR>
-                    <a:lnT w="6350" cap="flat" cmpd="sng" algn="ctr">
-                      <a:solidFill>
-                        <a:srgbClr val="DCDFDC"/>
-                      </a:solidFill>
-                      <a:prstDash val="solid"/>
-                      <a:round/>
-                      <a:headEnd type="none" w="med" len="med"/>
-                      <a:tailEnd type="none" w="med" len="med"/>
-                    </a:lnT>
-                    <a:lnB w="6350" cap="flat" cmpd="sng" algn="ctr">
-                      <a:solidFill>
-                        <a:srgbClr val="DCDFDC"/>
-                      </a:solidFill>
-                      <a:prstDash val="solid"/>
-                      <a:round/>
-                      <a:headEnd type="none" w="med" len="med"/>
-                      <a:tailEnd type="none" w="med" len="med"/>
-                    </a:lnB>
-                    <a:solidFill>
-                      <a:srgbClr val="FFFFFF"/>
-                    </a:solidFill>
-                  </a:tcPr>
-                </a:tc>
-              </a:tr>
-              <a:tr h="679269">
-                <a:tc>
-                  <a:txBody>
-                    <a:bodyPr/>
-                    <a:lstStyle/>
-                    <a:p>
-                      <a:pPr indent="0" marL="0">
-                        <a:buNone/>
-                      </a:pPr>
-                      <a:r>
-                        <a:rPr lang="en-US" sz="1300" dirty="0">
-                          <a:solidFill>
-                            <a:srgbClr val="1C2126"/>
-                          </a:solidFill>
-                          <a:latin typeface="Calibri" pitchFamily="34" charset="0"/>
-                          <a:ea typeface="Calibri" pitchFamily="34" charset="-122"/>
-                          <a:cs typeface="Calibri" pitchFamily="34" charset="-120"/>
-                        </a:rPr>
-                        <a:t>気象庁「土砂災害警戒情報について」</a:t>
-                      </a:r>
-                      <a:endParaRPr lang="en-US" sz="1300" dirty="0">
-                        <a:latin typeface="Calibri" charset="0"/>
-                        <a:ea typeface="Calibri" charset="0"/>
-                        <a:cs typeface="Calibri" charset="0"/>
-                      </a:endParaRPr>
-                    </a:p>
-                  </a:txBody>
-                  <a:tcPr marL="101600" marR="101600" marT="76200" marB="76200" anchor="ctr">
-                    <a:lnL w="6350" cap="flat" cmpd="sng" algn="ctr">
-                      <a:solidFill>
-                        <a:srgbClr val="DCDFDC"/>
-                      </a:solidFill>
-                      <a:prstDash val="solid"/>
-                      <a:round/>
-                      <a:headEnd type="none" w="med" len="med"/>
-                      <a:tailEnd type="none" w="med" len="med"/>
-                    </a:lnL>
-                    <a:lnR w="6350" cap="flat" cmpd="sng" algn="ctr">
-                      <a:solidFill>
-                        <a:srgbClr val="DCDFDC"/>
-                      </a:solidFill>
-                      <a:prstDash val="solid"/>
-                      <a:round/>
-                      <a:headEnd type="none" w="med" len="med"/>
-                      <a:tailEnd type="none" w="med" len="med"/>
-                    </a:lnR>
-                    <a:lnT w="6350" cap="flat" cmpd="sng" algn="ctr">
-                      <a:solidFill>
-                        <a:srgbClr val="DCDFDC"/>
-                      </a:solidFill>
-                      <a:prstDash val="solid"/>
-                      <a:round/>
-                      <a:headEnd type="none" w="med" len="med"/>
-                      <a:tailEnd type="none" w="med" len="med"/>
-                    </a:lnT>
-                    <a:lnB w="6350" cap="flat" cmpd="sng" algn="ctr">
-                      <a:solidFill>
-                        <a:srgbClr val="DCDFDC"/>
-                      </a:solidFill>
-                      <a:prstDash val="solid"/>
-                      <a:round/>
-                      <a:headEnd type="none" w="med" len="med"/>
-                      <a:tailEnd type="none" w="med" len="med"/>
-                    </a:lnB>
-                    <a:solidFill>
-                      <a:srgbClr val="F4F5F3"/>
-                    </a:solidFill>
-                  </a:tcPr>
-                </a:tc>
-                <a:tc>
-                  <a:txBody>
-                    <a:bodyPr/>
-                    <a:lstStyle/>
-                    <a:p>
-                      <a:pPr indent="0" marL="0">
-                        <a:buNone/>
-                      </a:pPr>
-                      <a:r>
-                        <a:rPr lang="en-US" sz="1300" dirty="0">
-                          <a:solidFill>
-                            <a:srgbClr val="4B545C"/>
-                          </a:solidFill>
-                          <a:latin typeface="Calibri" pitchFamily="34" charset="0"/>
-                          <a:ea typeface="Calibri" pitchFamily="34" charset="-122"/>
-                          <a:cs typeface="Calibri" pitchFamily="34" charset="-120"/>
-                        </a:rPr>
-                        <a:t>公式発表の表示・転載</a:t>
+                        <a:t>危険エリアの地図表示（区域データ本体を使用）</a:t>
                       </a:r>
                       <a:endParaRPr lang="en-US" sz="1300" dirty="0">
                         <a:latin typeface="Calibri" charset="0"/>
@@ -5120,144 +4884,6 @@
                           <a:ea typeface="Calibri" pitchFamily="34" charset="-122"/>
                           <a:cs typeface="Calibri" pitchFamily="34" charset="-120"/>
                         </a:rPr>
-                        <a:t>国交省砂防部「土砂災害から身を守るために」</a:t>
-                      </a:r>
-                      <a:endParaRPr lang="en-US" sz="1300" dirty="0">
-                        <a:latin typeface="Calibri" charset="0"/>
-                        <a:ea typeface="Calibri" charset="0"/>
-                        <a:cs typeface="Calibri" charset="0"/>
-                      </a:endParaRPr>
-                    </a:p>
-                  </a:txBody>
-                  <a:tcPr marL="101600" marR="101600" marT="76200" marB="76200" anchor="ctr">
-                    <a:lnL w="6350" cap="flat" cmpd="sng" algn="ctr">
-                      <a:solidFill>
-                        <a:srgbClr val="DCDFDC"/>
-                      </a:solidFill>
-                      <a:prstDash val="solid"/>
-                      <a:round/>
-                      <a:headEnd type="none" w="med" len="med"/>
-                      <a:tailEnd type="none" w="med" len="med"/>
-                    </a:lnL>
-                    <a:lnR w="6350" cap="flat" cmpd="sng" algn="ctr">
-                      <a:solidFill>
-                        <a:srgbClr val="DCDFDC"/>
-                      </a:solidFill>
-                      <a:prstDash val="solid"/>
-                      <a:round/>
-                      <a:headEnd type="none" w="med" len="med"/>
-                      <a:tailEnd type="none" w="med" len="med"/>
-                    </a:lnR>
-                    <a:lnT w="6350" cap="flat" cmpd="sng" algn="ctr">
-                      <a:solidFill>
-                        <a:srgbClr val="DCDFDC"/>
-                      </a:solidFill>
-                      <a:prstDash val="solid"/>
-                      <a:round/>
-                      <a:headEnd type="none" w="med" len="med"/>
-                      <a:tailEnd type="none" w="med" len="med"/>
-                    </a:lnT>
-                    <a:lnB w="6350" cap="flat" cmpd="sng" algn="ctr">
-                      <a:solidFill>
-                        <a:srgbClr val="DCDFDC"/>
-                      </a:solidFill>
-                      <a:prstDash val="solid"/>
-                      <a:round/>
-                      <a:headEnd type="none" w="med" len="med"/>
-                      <a:tailEnd type="none" w="med" len="med"/>
-                    </a:lnB>
-                    <a:solidFill>
-                      <a:srgbClr val="F4F5F3"/>
-                    </a:solidFill>
-                  </a:tcPr>
-                </a:tc>
-                <a:tc>
-                  <a:txBody>
-                    <a:bodyPr/>
-                    <a:lstStyle/>
-                    <a:p>
-                      <a:pPr indent="0" marL="0">
-                        <a:buNone/>
-                      </a:pPr>
-                      <a:r>
-                        <a:rPr lang="en-US" sz="1300" dirty="0">
-                          <a:solidFill>
-                            <a:srgbClr val="4B545C"/>
-                          </a:solidFill>
-                          <a:latin typeface="Calibri" pitchFamily="34" charset="0"/>
-                          <a:ea typeface="Calibri" pitchFamily="34" charset="-122"/>
-                          <a:cs typeface="Calibri" pitchFamily="34" charset="-120"/>
-                        </a:rPr>
-                        <a:t>前兆現象チェックリストの出典</a:t>
-                      </a:r>
-                      <a:endParaRPr lang="en-US" sz="1300" dirty="0">
-                        <a:latin typeface="Calibri" charset="0"/>
-                        <a:ea typeface="Calibri" charset="0"/>
-                        <a:cs typeface="Calibri" charset="0"/>
-                      </a:endParaRPr>
-                    </a:p>
-                  </a:txBody>
-                  <a:tcPr marL="101600" marR="101600" marT="76200" marB="76200" anchor="ctr">
-                    <a:lnL w="6350" cap="flat" cmpd="sng" algn="ctr">
-                      <a:solidFill>
-                        <a:srgbClr val="DCDFDC"/>
-                      </a:solidFill>
-                      <a:prstDash val="solid"/>
-                      <a:round/>
-                      <a:headEnd type="none" w="med" len="med"/>
-                      <a:tailEnd type="none" w="med" len="med"/>
-                    </a:lnL>
-                    <a:lnR w="6350" cap="flat" cmpd="sng" algn="ctr">
-                      <a:solidFill>
-                        <a:srgbClr val="DCDFDC"/>
-                      </a:solidFill>
-                      <a:prstDash val="solid"/>
-                      <a:round/>
-                      <a:headEnd type="none" w="med" len="med"/>
-                      <a:tailEnd type="none" w="med" len="med"/>
-                    </a:lnR>
-                    <a:lnT w="6350" cap="flat" cmpd="sng" algn="ctr">
-                      <a:solidFill>
-                        <a:srgbClr val="DCDFDC"/>
-                      </a:solidFill>
-                      <a:prstDash val="solid"/>
-                      <a:round/>
-                      <a:headEnd type="none" w="med" len="med"/>
-                      <a:tailEnd type="none" w="med" len="med"/>
-                    </a:lnT>
-                    <a:lnB w="6350" cap="flat" cmpd="sng" algn="ctr">
-                      <a:solidFill>
-                        <a:srgbClr val="DCDFDC"/>
-                      </a:solidFill>
-                      <a:prstDash val="solid"/>
-                      <a:round/>
-                      <a:headEnd type="none" w="med" len="med"/>
-                      <a:tailEnd type="none" w="med" len="med"/>
-                    </a:lnB>
-                    <a:solidFill>
-                      <a:srgbClr val="F4F5F3"/>
-                    </a:solidFill>
-                  </a:tcPr>
-                </a:tc>
-              </a:tr>
-              <a:tr h="679269">
-                <a:tc>
-                  <a:txBody>
-                    <a:bodyPr/>
-                    <a:lstStyle/>
-                    <a:p>
-                      <a:pPr indent="0" marL="0">
-                        <a:buNone/>
-                      </a:pPr>
-                      <a:r>
-                        <a:rPr lang="en-US" sz="1300" dirty="0">
-                          <a:solidFill>
-                            <a:srgbClr val="1C2126"/>
-                          </a:solidFill>
-                          <a:latin typeface="Calibri" pitchFamily="34" charset="0"/>
-                          <a:ea typeface="Calibri" pitchFamily="34" charset="-122"/>
-                          <a:cs typeface="Calibri" pitchFamily="34" charset="-120"/>
-                        </a:rPr>
                         <a:t>首相官邸「土砂災害」防災情報ページ</a:t>
                       </a:r>
                       <a:endParaRPr lang="en-US" sz="1300" dirty="0">
@@ -5326,7 +4952,7 @@
                           <a:ea typeface="Calibri" pitchFamily="34" charset="-122"/>
                           <a:cs typeface="Calibri" pitchFamily="34" charset="-120"/>
                         </a:rPr>
-                        <a:t>過去の災害事例（参考情報）の出典</a:t>
+                        <a:t>過去の災害事例（参考情報）・前兆現象チェックリストの出典</a:t>
                       </a:r>
                       <a:endParaRPr lang="en-US" sz="1300" dirty="0">
                         <a:latin typeface="Calibri" charset="0"/>

--- a/kizashi-app/submission/presentation.pptx
+++ b/kizashi-app/submission/presentation.pptx
@@ -4349,7 +4349,7 @@
                 <a:ea typeface="Calibri" pitchFamily="34" charset="-122"/>
                 <a:cs typeface="Calibri" pitchFamily="34" charset="-120"/>
               </a:rPr>
-              <a:t>▶ クリックで再生（無音・約20秒）</a:t>
+              <a:t>▶ クリックで再生（無音・約17秒）</a:t>
             </a:r>
             <a:endParaRPr lang="en-US" sz="1100" dirty="0"/>
           </a:p>

--- a/kizashi-app/submission/presentation.pptx
+++ b/kizashi-app/submission/presentation.pptx
@@ -4283,39 +4283,6 @@
           </a:p>
         </p:txBody>
       </p:sp>
-      <p:pic>
-        <p:nvPicPr>
-          <p:cNvPr id="3" name="Media 0">
-            <a:hlinkClick r:id="" action="ppaction://media"/>
-          </p:cNvPr>
-          <p:cNvPicPr>
-            <a:picLocks noChangeAspect="1"/>
-          </p:cNvPicPr>
-          <p:nvPr>
-            <a:videoFile r:link="rId1"/>
-            <p:extLst>
-              <p:ext uri="{DAA4B4D4-6D71-4841-9C94-3DE7FCFB9230}">
-                <p14:media xmlns:p14="http://schemas.microsoft.com/office/powerpoint/2010/main" r:embed="rId2"/>
-              </p:ext>
-            </p:extLst>
-          </p:nvPr>
-        </p:nvPicPr>
-        <p:blipFill>
-          <a:blip r:embed="rId3"/>
-          <a:stretch>
-            <a:fillRect/>
-          </a:stretch>
-        </p:blipFill>
-        <p:spPr>
-          <a:xfrm>
-            <a:off x="2093976" y="1783080"/>
-            <a:ext cx="8001000" cy="4498848"/>
-          </a:xfrm>
-          <a:prstGeom prst="rect">
-            <a:avLst/>
-          </a:prstGeom>
-        </p:spPr>
-      </p:pic>
       <p:sp>
         <p:nvSpPr>
           <p:cNvPr id="5" name="Text 2"/>
@@ -4349,7 +4316,7 @@
                 <a:ea typeface="Calibri" pitchFamily="34" charset="-122"/>
                 <a:cs typeface="Calibri" pitchFamily="34" charset="-120"/>
               </a:rPr>
-              <a:t>▶ クリックで再生（無音・約17秒）</a:t>
+              <a:t>操作デモ動画は別ファイル(demo_video.mp4)にて提出</a:t>
             </a:r>
             <a:endParaRPr lang="en-US" sz="1100" dirty="0"/>
           </a:p>

--- a/kizashi-app/submission/presentation.pptx
+++ b/kizashi-app/submission/presentation.pptx
@@ -4316,17 +4316,72 @@
                 <a:ea typeface="Calibri" pitchFamily="34" charset="-122"/>
                 <a:cs typeface="Calibri" pitchFamily="34" charset="-120"/>
               </a:rPr>
-              <a:t>操作デモ動画は別ファイル(demo_video.mp4)にて提出</a:t>
+              <a:t>▶ クリックで再生（無音・約17秒）</a:t>
             </a:r>
             <a:endParaRPr lang="en-US" sz="1100" dirty="0"/>
           </a:p>
         </p:txBody>
       </p:sp>
+      <p:pic>
+        <p:nvPicPr>
+          <p:cNvPr id="6" name="demo_video.mp4">
+            <a:hlinkClick r:id="" action="ppaction://media"/>
+          </p:cNvPr>
+          <p:cNvPicPr>
+            <a:picLocks noChangeAspect="1"/>
+          </p:cNvPicPr>
+          <p:nvPr>
+            <a:videoFile r:link="rId2"/>
+            <p:extLst>
+              <p:ext uri="{DAA4B4D4-6D71-4841-9C94-3DE7FCFB9230}">
+                <p14:media xmlns:p14="http://schemas.microsoft.com/office/powerpoint/2010/main" r:embed="rId3"/>
+              </p:ext>
+            </p:extLst>
+          </p:nvPr>
+        </p:nvPicPr>
+        <p:blipFill>
+          <a:blip r:embed="rId1"/>
+          <a:stretch>
+            <a:fillRect/>
+          </a:stretch>
+        </p:blipFill>
+        <p:spPr>
+          <a:xfrm>
+            <a:off x="2596000" y="1750000"/>
+            <a:ext cx="7000000" cy="3937500"/>
+          </a:xfrm>
+          <a:prstGeom prst="rect">
+            <a:avLst/>
+          </a:prstGeom>
+        </p:spPr>
+      </p:pic>
     </p:spTree>
   </p:cSld>
   <p:clrMapOvr>
     <a:masterClrMapping/>
   </p:clrMapOvr>
+  <p:timing>
+    <p:tnLst>
+      <p:par>
+        <p:cTn id="1" dur="indefinite" restart="never" nodeType="tmRoot">
+          <p:childTnLst>
+            <p:video>
+              <p:cMediaNode vol="80000">
+                <p:cTn id="2" fill="hold" display="0">
+                  <p:stCondLst>
+                    <p:cond delay="indefinite"/>
+                  </p:stCondLst>
+                </p:cTn>
+                <p:tgtEl>
+                  <p:spTgt spid="6"/>
+                </p:tgtEl>
+              </p:cMediaNode>
+            </p:video>
+          </p:childTnLst>
+        </p:cTn>
+      </p:par>
+    </p:tnLst>
+  </p:timing>
 </p:sld>
 </file>
 

--- a/kizashi-app/submission/presentation.pptx
+++ b/kizashi-app/submission/presentation.pptx
@@ -1243,7 +1243,7 @@
         <a:spcBef>
           <a:spcPct val="20000"/>
         </a:spcBef>
-        <a:buFont typeface="Arial" pitchFamily="34" charset="0"/>
+        <a:buFont typeface="游ゴシック" pitchFamily="34" charset="0"/>
         <a:buChar char="•"/>
         <a:defRPr sz="3200" kern="1200">
           <a:solidFill>
@@ -1258,7 +1258,7 @@
         <a:spcBef>
           <a:spcPct val="20000"/>
         </a:spcBef>
-        <a:buFont typeface="Arial" pitchFamily="34" charset="0"/>
+        <a:buFont typeface="游ゴシック" pitchFamily="34" charset="0"/>
         <a:buChar char="–"/>
         <a:defRPr sz="2800" kern="1200">
           <a:solidFill>
@@ -1273,7 +1273,7 @@
         <a:spcBef>
           <a:spcPct val="20000"/>
         </a:spcBef>
-        <a:buFont typeface="Arial" pitchFamily="34" charset="0"/>
+        <a:buFont typeface="游ゴシック" pitchFamily="34" charset="0"/>
         <a:buChar char="•"/>
         <a:defRPr sz="2400" kern="1200">
           <a:solidFill>
@@ -1288,7 +1288,7 @@
         <a:spcBef>
           <a:spcPct val="20000"/>
         </a:spcBef>
-        <a:buFont typeface="Arial" pitchFamily="34" charset="0"/>
+        <a:buFont typeface="游ゴシック" pitchFamily="34" charset="0"/>
         <a:buChar char="–"/>
         <a:defRPr sz="2000" kern="1200">
           <a:solidFill>
@@ -1303,7 +1303,7 @@
         <a:spcBef>
           <a:spcPct val="20000"/>
         </a:spcBef>
-        <a:buFont typeface="Arial" pitchFamily="34" charset="0"/>
+        <a:buFont typeface="游ゴシック" pitchFamily="34" charset="0"/>
         <a:buChar char="»"/>
         <a:defRPr sz="2000" kern="1200">
           <a:solidFill>
@@ -1318,7 +1318,7 @@
         <a:spcBef>
           <a:spcPct val="20000"/>
         </a:spcBef>
-        <a:buFont typeface="Arial" pitchFamily="34" charset="0"/>
+        <a:buFont typeface="游ゴシック" pitchFamily="34" charset="0"/>
         <a:buChar char="•"/>
         <a:defRPr sz="2000" kern="1200">
           <a:solidFill>
@@ -1333,7 +1333,7 @@
         <a:spcBef>
           <a:spcPct val="20000"/>
         </a:spcBef>
-        <a:buFont typeface="Arial" pitchFamily="34" charset="0"/>
+        <a:buFont typeface="游ゴシック" pitchFamily="34" charset="0"/>
         <a:buChar char="•"/>
         <a:defRPr sz="2000" kern="1200">
           <a:solidFill>
@@ -1348,7 +1348,7 @@
         <a:spcBef>
           <a:spcPct val="20000"/>
         </a:spcBef>
-        <a:buFont typeface="Arial" pitchFamily="34" charset="0"/>
+        <a:buFont typeface="游ゴシック" pitchFamily="34" charset="0"/>
         <a:buChar char="•"/>
         <a:defRPr sz="2000" kern="1200">
           <a:solidFill>
@@ -1363,7 +1363,7 @@
         <a:spcBef>
           <a:spcPct val="20000"/>
         </a:spcBef>
-        <a:buFont typeface="Arial" pitchFamily="34" charset="0"/>
+        <a:buFont typeface="游ゴシック" pitchFamily="34" charset="0"/>
         <a:buChar char="•"/>
         <a:defRPr sz="2000" kern="1200">
           <a:solidFill>
@@ -1507,7 +1507,7 @@
         <p:spPr>
           <a:xfrm>
             <a:off x="822960" y="1371600"/>
-            <a:ext cx="10515600" cy="457200"/>
+            <a:ext cx="6177000" cy="457200"/>
           </a:xfrm>
           <a:prstGeom prst="rect">
             <a:avLst/>
@@ -1527,9 +1527,9 @@
                 <a:solidFill>
                   <a:srgbClr val="BFE3DA"/>
                 </a:solidFill>
-                <a:latin typeface="Calibri" pitchFamily="34" charset="0"/>
-                <a:ea typeface="Calibri" pitchFamily="34" charset="-122"/>
-                <a:cs typeface="Calibri" pitchFamily="34" charset="-120"/>
+                <a:latin typeface="游ゴシック" pitchFamily="34" charset="0"/>
+                <a:ea typeface="游ゴシック" pitchFamily="34" charset="-122"/>
+                <a:cs typeface="游ゴシック" pitchFamily="34" charset="-120"/>
               </a:rPr>
               <a:t>都知事杯オープンデータ・ハッカソン 2026</a:t>
             </a:r>
@@ -1546,7 +1546,7 @@
         <p:spPr>
           <a:xfrm>
             <a:off x="777240" y="1828800"/>
-            <a:ext cx="10515600" cy="1463040"/>
+            <a:ext cx="6177000" cy="1463040"/>
           </a:xfrm>
           <a:prstGeom prst="rect">
             <a:avLst/>
@@ -1566,9 +1566,9 @@
                 <a:solidFill>
                   <a:srgbClr val="FFFFFF"/>
                 </a:solidFill>
-                <a:latin typeface="Cambria" pitchFamily="34" charset="0"/>
-                <a:ea typeface="Cambria" pitchFamily="34" charset="-122"/>
-                <a:cs typeface="Cambria" pitchFamily="34" charset="-120"/>
+                <a:latin typeface="游ゴシック" pitchFamily="34" charset="0"/>
+                <a:ea typeface="游ゴシック" pitchFamily="34" charset="-122"/>
+                <a:cs typeface="游ゴシック" pitchFamily="34" charset="-120"/>
               </a:rPr>
               <a:t>結（ゆい）</a:t>
             </a:r>
@@ -1585,7 +1585,7 @@
         <p:spPr>
           <a:xfrm>
             <a:off x="822960" y="3383280"/>
-            <a:ext cx="9692640" cy="731520"/>
+            <a:ext cx="6177000" cy="731520"/>
           </a:xfrm>
           <a:prstGeom prst="rect">
             <a:avLst/>
@@ -1605,9 +1605,9 @@
                 <a:solidFill>
                   <a:srgbClr val="E4EFEA"/>
                 </a:solidFill>
-                <a:latin typeface="Calibri" pitchFamily="34" charset="0"/>
-                <a:ea typeface="Calibri" pitchFamily="34" charset="-122"/>
-                <a:cs typeface="Calibri" pitchFamily="34" charset="-120"/>
+                <a:latin typeface="游ゴシック" pitchFamily="34" charset="0"/>
+                <a:ea typeface="游ゴシック" pitchFamily="34" charset="-122"/>
+                <a:cs typeface="游ゴシック" pitchFamily="34" charset="-120"/>
               </a:rPr>
               <a:t>土砂災害現場で無事を待つ家族と救助隊を情報共有でつなぎ、救助を後押しする無料アプリ「結」</a:t>
             </a:r>
@@ -1673,9 +1673,9 @@
                 <a:solidFill>
                   <a:srgbClr val="FFFFFF"/>
                 </a:solidFill>
-                <a:latin typeface="Calibri" pitchFamily="34" charset="0"/>
-                <a:ea typeface="Calibri" pitchFamily="34" charset="-122"/>
-                <a:cs typeface="Calibri" pitchFamily="34" charset="-120"/>
+                <a:latin typeface="游ゴシック" pitchFamily="34" charset="0"/>
+                <a:ea typeface="游ゴシック" pitchFamily="34" charset="-122"/>
+                <a:cs typeface="游ゴシック" pitchFamily="34" charset="-120"/>
               </a:rPr>
               <a:t>チーム「結」（個人開発）</a:t>
             </a:r>
@@ -1692,7 +1692,7 @@
         <p:spPr>
           <a:xfrm>
             <a:off x="822960" y="6126480"/>
-            <a:ext cx="9144000" cy="365760"/>
+            <a:ext cx="6177000" cy="365760"/>
           </a:xfrm>
           <a:prstGeom prst="rect">
             <a:avLst/>
@@ -1712,9 +1712,9 @@
                 <a:solidFill>
                   <a:srgbClr val="9FC7BC"/>
                 </a:solidFill>
-                <a:latin typeface="Calibri" pitchFamily="34" charset="0"/>
-                <a:ea typeface="Calibri" pitchFamily="34" charset="-122"/>
-                <a:cs typeface="Calibri" pitchFamily="34" charset="-120"/>
+                <a:latin typeface="游ゴシック" pitchFamily="34" charset="0"/>
+                <a:ea typeface="游ゴシック" pitchFamily="34" charset="-122"/>
+                <a:cs typeface="游ゴシック" pitchFamily="34" charset="-120"/>
               </a:rPr>
               <a:t>現場で待機する被災者家族・関係者のための、Web完結・無料の情報共有アプリ</a:t>
             </a:r>
@@ -1722,6 +1722,30 @@
           </a:p>
         </p:txBody>
       </p:sp>
+      <p:pic>
+        <p:nvPicPr>
+          <p:cNvPr id="8" name="Picture 7" descr="handshake.png"/>
+          <p:cNvPicPr>
+            <a:picLocks noChangeAspect="1"/>
+          </p:cNvPicPr>
+          <p:nvPr/>
+        </p:nvPicPr>
+        <p:blipFill>
+          <a:blip r:embed="rId3"/>
+          <a:stretch>
+            <a:fillRect/>
+          </a:stretch>
+        </p:blipFill>
+        <p:spPr>
+          <a:xfrm>
+            <a:off x="7550000" y="1329000"/>
+            <a:ext cx="4200000" cy="4200000"/>
+          </a:xfrm>
+          <a:prstGeom prst="rect">
+            <a:avLst/>
+          </a:prstGeom>
+        </p:spPr>
+      </p:pic>
     </p:spTree>
   </p:cSld>
   <p:clrMapOvr>
@@ -1783,9 +1807,9 @@
                 <a:solidFill>
                   <a:srgbClr val="1F4E4A"/>
                 </a:solidFill>
-                <a:latin typeface="Cambria" pitchFamily="34" charset="0"/>
-                <a:ea typeface="Cambria" pitchFamily="34" charset="-122"/>
-                <a:cs typeface="Cambria" pitchFamily="34" charset="-120"/>
+                <a:latin typeface="游ゴシック" pitchFamily="34" charset="0"/>
+                <a:ea typeface="游ゴシック" pitchFamily="34" charset="-122"/>
+                <a:cs typeface="游ゴシック" pitchFamily="34" charset="-120"/>
               </a:rPr>
               <a:t>課題</a:t>
             </a:r>
@@ -1822,9 +1846,9 @@
                 <a:solidFill>
                   <a:srgbClr val="4B545C"/>
                 </a:solidFill>
-                <a:latin typeface="Calibri" pitchFamily="34" charset="0"/>
-                <a:ea typeface="Calibri" pitchFamily="34" charset="-122"/>
-                <a:cs typeface="Calibri" pitchFamily="34" charset="-120"/>
+                <a:latin typeface="游ゴシック" pitchFamily="34" charset="0"/>
+                <a:ea typeface="游ゴシック" pitchFamily="34" charset="-122"/>
+                <a:cs typeface="游ゴシック" pitchFamily="34" charset="-120"/>
               </a:rPr>
               <a:t>土砂災害の現場で、家族は「ただ待つ」ことしかできなかった</a:t>
             </a:r>
@@ -1946,9 +1970,9 @@
                 <a:solidFill>
                   <a:srgbClr val="1C2126"/>
                 </a:solidFill>
-                <a:latin typeface="Cambria" pitchFamily="34" charset="0"/>
-                <a:ea typeface="Cambria" pitchFamily="34" charset="-122"/>
-                <a:cs typeface="Cambria" pitchFamily="34" charset="-120"/>
+                <a:latin typeface="游ゴシック" pitchFamily="34" charset="0"/>
+                <a:ea typeface="游ゴシック" pitchFamily="34" charset="-122"/>
+                <a:cs typeface="游ゴシック" pitchFamily="34" charset="-120"/>
               </a:rPr>
               <a:t>何もできず、ただ待つ</a:t>
             </a:r>
@@ -1988,9 +2012,9 @@
                 <a:solidFill>
                   <a:srgbClr val="4B545C"/>
                 </a:solidFill>
-                <a:latin typeface="Calibri" pitchFamily="34" charset="0"/>
-                <a:ea typeface="Calibri" pitchFamily="34" charset="-122"/>
-                <a:cs typeface="Calibri" pitchFamily="34" charset="-120"/>
+                <a:latin typeface="游ゴシック" pitchFamily="34" charset="0"/>
+                <a:ea typeface="游ゴシック" pitchFamily="34" charset="-122"/>
+                <a:cs typeface="游ゴシック" pitchFamily="34" charset="-120"/>
               </a:rPr>
               <a:t>現場に居合わせた家族・親戚は、捜索・救助の間、何も手伝うことができない。</a:t>
             </a:r>
@@ -2112,9 +2136,9 @@
                 <a:solidFill>
                   <a:srgbClr val="1C2126"/>
                 </a:solidFill>
-                <a:latin typeface="Cambria" pitchFamily="34" charset="0"/>
-                <a:ea typeface="Cambria" pitchFamily="34" charset="-122"/>
-                <a:cs typeface="Cambria" pitchFamily="34" charset="-120"/>
+                <a:latin typeface="游ゴシック" pitchFamily="34" charset="0"/>
+                <a:ea typeface="游ゴシック" pitchFamily="34" charset="-122"/>
+                <a:cs typeface="游ゴシック" pitchFamily="34" charset="-120"/>
               </a:rPr>
               <a:t>聞き取りで指揮の手が止まる</a:t>
             </a:r>
@@ -2154,9 +2178,9 @@
                 <a:solidFill>
                   <a:srgbClr val="4B545C"/>
                 </a:solidFill>
-                <a:latin typeface="Calibri" pitchFamily="34" charset="0"/>
-                <a:ea typeface="Calibri" pitchFamily="34" charset="-122"/>
-                <a:cs typeface="Calibri" pitchFamily="34" charset="-120"/>
+                <a:latin typeface="游ゴシック" pitchFamily="34" charset="0"/>
+                <a:ea typeface="游ゴシック" pitchFamily="34" charset="-122"/>
+                <a:cs typeface="游ゴシック" pitchFamily="34" charset="-120"/>
               </a:rPr>
               <a:t>唯一伝えられる間取りや特徴も、司令官が家族から直接聞き取るため、捜索の手が止まる。</a:t>
             </a:r>
@@ -2278,9 +2302,9 @@
                 <a:solidFill>
                   <a:srgbClr val="1C2126"/>
                 </a:solidFill>
-                <a:latin typeface="Cambria" pitchFamily="34" charset="0"/>
-                <a:ea typeface="Cambria" pitchFamily="34" charset="-122"/>
-                <a:cs typeface="Cambria" pitchFamily="34" charset="-120"/>
+                <a:latin typeface="游ゴシック" pitchFamily="34" charset="0"/>
+                <a:ea typeface="游ゴシック" pitchFamily="34" charset="-122"/>
+                <a:cs typeface="游ゴシック" pitchFamily="34" charset="-120"/>
               </a:rPr>
               <a:t>人づての伝言でロスが生じる</a:t>
             </a:r>
@@ -2320,9 +2344,9 @@
                 <a:solidFill>
                   <a:srgbClr val="4B545C"/>
                 </a:solidFill>
-                <a:latin typeface="Calibri" pitchFamily="34" charset="0"/>
-                <a:ea typeface="Calibri" pitchFamily="34" charset="-122"/>
-                <a:cs typeface="Calibri" pitchFamily="34" charset="-120"/>
+                <a:latin typeface="游ゴシック" pitchFamily="34" charset="0"/>
+                <a:ea typeface="游ゴシック" pitchFamily="34" charset="-122"/>
+                <a:cs typeface="游ゴシック" pitchFamily="34" charset="-120"/>
               </a:rPr>
               <a:t>聞き取った内容を他の関係者へ伝えるのも人づてに頼らざるを得ず、遅延や伝達ミスが起きる。</a:t>
             </a:r>
@@ -2359,9 +2383,9 @@
                 <a:solidFill>
                   <a:srgbClr val="4B545C"/>
                 </a:solidFill>
-                <a:latin typeface="Calibri" pitchFamily="34" charset="0"/>
-                <a:ea typeface="Calibri" pitchFamily="34" charset="-122"/>
-                <a:cs typeface="Calibri" pitchFamily="34" charset="-120"/>
+                <a:latin typeface="游ゴシック" pitchFamily="34" charset="0"/>
+                <a:ea typeface="游ゴシック" pitchFamily="34" charset="-122"/>
+                <a:cs typeface="游ゴシック" pitchFamily="34" charset="-120"/>
               </a:rPr>
               <a:t>開発者自身が親戚の土砂災害に居合わせ、徹夜で立ち会った実体験から生まれた課題意識です。</a:t>
             </a:r>
@@ -2430,9 +2454,9 @@
                 <a:solidFill>
                   <a:srgbClr val="FFFFFF"/>
                 </a:solidFill>
-                <a:latin typeface="Cambria" pitchFamily="34" charset="0"/>
-                <a:ea typeface="Cambria" pitchFamily="34" charset="-122"/>
-                <a:cs typeface="Cambria" pitchFamily="34" charset="-120"/>
+                <a:latin typeface="游ゴシック" pitchFamily="34" charset="0"/>
+                <a:ea typeface="游ゴシック" pitchFamily="34" charset="-122"/>
+                <a:cs typeface="游ゴシック" pitchFamily="34" charset="-120"/>
               </a:rPr>
               <a:t>解決策</a:t>
             </a:r>
@@ -2469,9 +2493,9 @@
                 <a:solidFill>
                   <a:srgbClr val="BFE3DA"/>
                 </a:solidFill>
-                <a:latin typeface="Calibri" pitchFamily="34" charset="0"/>
-                <a:ea typeface="Calibri" pitchFamily="34" charset="-122"/>
-                <a:cs typeface="Calibri" pitchFamily="34" charset="-120"/>
+                <a:latin typeface="游ゴシック" pitchFamily="34" charset="0"/>
+                <a:ea typeface="游ゴシック" pitchFamily="34" charset="-122"/>
+                <a:cs typeface="游ゴシック" pitchFamily="34" charset="-120"/>
               </a:rPr>
               <a:t>6桁のコードだけで、家族と現場をつなぐ</a:t>
             </a:r>
@@ -2577,9 +2601,9 @@
                 <a:solidFill>
                   <a:srgbClr val="1C2126"/>
                 </a:solidFill>
-                <a:latin typeface="Calibri" pitchFamily="34" charset="0"/>
-                <a:ea typeface="Calibri" pitchFamily="34" charset="-122"/>
-                <a:cs typeface="Calibri" pitchFamily="34" charset="-120"/>
+                <a:latin typeface="游ゴシック" pitchFamily="34" charset="0"/>
+                <a:ea typeface="游ゴシック" pitchFamily="34" charset="-122"/>
+                <a:cs typeface="游ゴシック" pitchFamily="34" charset="-120"/>
               </a:rPr>
               <a:t>待機する家族・関係者</a:t>
             </a:r>
@@ -2652,9 +2676,9 @@
                 <a:solidFill>
                   <a:srgbClr val="1C2126"/>
                 </a:solidFill>
-                <a:latin typeface="Calibri" pitchFamily="34" charset="0"/>
-                <a:ea typeface="Calibri" pitchFamily="34" charset="-122"/>
-                <a:cs typeface="Calibri" pitchFamily="34" charset="-120"/>
+                <a:latin typeface="游ゴシック" pitchFamily="34" charset="0"/>
+                <a:ea typeface="游ゴシック" pitchFamily="34" charset="-122"/>
+                <a:cs typeface="游ゴシック" pitchFamily="34" charset="-120"/>
               </a:rPr>
               <a:t>現場ルーム</a:t>
             </a:r>
@@ -2672,9 +2696,9 @@
                 <a:solidFill>
                   <a:srgbClr val="1C2126"/>
                 </a:solidFill>
-                <a:latin typeface="Calibri" pitchFamily="34" charset="0"/>
-                <a:ea typeface="Calibri" pitchFamily="34" charset="-122"/>
-                <a:cs typeface="Calibri" pitchFamily="34" charset="-120"/>
+                <a:latin typeface="游ゴシック" pitchFamily="34" charset="0"/>
+                <a:ea typeface="游ゴシック" pitchFamily="34" charset="-122"/>
+                <a:cs typeface="游ゴシック" pitchFamily="34" charset="-120"/>
               </a:rPr>
               <a:t>6桁コード・ログイン不要</a:t>
             </a:r>
@@ -2780,9 +2804,9 @@
                 <a:solidFill>
                   <a:srgbClr val="1C2126"/>
                 </a:solidFill>
-                <a:latin typeface="Calibri" pitchFamily="34" charset="0"/>
-                <a:ea typeface="Calibri" pitchFamily="34" charset="-122"/>
-                <a:cs typeface="Calibri" pitchFamily="34" charset="-120"/>
+                <a:latin typeface="游ゴシック" pitchFamily="34" charset="0"/>
+                <a:ea typeface="游ゴシック" pitchFamily="34" charset="-122"/>
+                <a:cs typeface="游ゴシック" pitchFamily="34" charset="-120"/>
               </a:rPr>
               <a:t>現場指揮・救助隊</a:t>
             </a:r>
@@ -2891,9 +2915,9 @@
                 <a:solidFill>
                   <a:srgbClr val="FFFFFF"/>
                 </a:solidFill>
-                <a:latin typeface="Calibri" pitchFamily="34" charset="0"/>
-                <a:ea typeface="Calibri" pitchFamily="34" charset="-122"/>
-                <a:cs typeface="Calibri" pitchFamily="34" charset="-120"/>
+                <a:latin typeface="游ゴシック" pitchFamily="34" charset="0"/>
+                <a:ea typeface="游ゴシック" pitchFamily="34" charset="-122"/>
+                <a:cs typeface="游ゴシック" pitchFamily="34" charset="-120"/>
               </a:rPr>
               <a:t>事前に整理された情報がそのまま届くため、聞き取りの手間がなくなり、捜索・救助のスピードが落ちない。</a:t>
             </a:r>
@@ -2930,9 +2954,9 @@
                 <a:solidFill>
                   <a:srgbClr val="9FC7BC"/>
                 </a:solidFill>
-                <a:latin typeface="Calibri" pitchFamily="34" charset="0"/>
-                <a:ea typeface="Calibri" pitchFamily="34" charset="-122"/>
-                <a:cs typeface="Calibri" pitchFamily="34" charset="-120"/>
+                <a:latin typeface="游ゴシック" pitchFamily="34" charset="0"/>
+                <a:ea typeface="游ゴシック" pitchFamily="34" charset="-122"/>
+                <a:cs typeface="游ゴシック" pitchFamily="34" charset="-120"/>
               </a:rPr>
               <a:t>対象データは東京都建設局河川部のオープンデータ（CC BY 4.0）を活用。Cloudflare Workers + D1で構築、完全無料で運用。</a:t>
             </a:r>
@@ -3001,9 +3025,9 @@
                 <a:solidFill>
                   <a:srgbClr val="1F4E4A"/>
                 </a:solidFill>
-                <a:latin typeface="Cambria" pitchFamily="34" charset="0"/>
-                <a:ea typeface="Cambria" pitchFamily="34" charset="-122"/>
-                <a:cs typeface="Cambria" pitchFamily="34" charset="-120"/>
+                <a:latin typeface="游ゴシック" pitchFamily="34" charset="0"/>
+                <a:ea typeface="游ゴシック" pitchFamily="34" charset="-122"/>
+                <a:cs typeface="游ゴシック" pitchFamily="34" charset="-120"/>
               </a:rPr>
               <a:t>プロダクト</a:t>
             </a:r>
@@ -3040,9 +3064,9 @@
                 <a:solidFill>
                   <a:srgbClr val="4B545C"/>
                 </a:solidFill>
-                <a:latin typeface="Calibri" pitchFamily="34" charset="0"/>
-                <a:ea typeface="Calibri" pitchFamily="34" charset="-122"/>
-                <a:cs typeface="Calibri" pitchFamily="34" charset="-120"/>
+                <a:latin typeface="游ゴシック" pitchFamily="34" charset="0"/>
+                <a:ea typeface="游ゴシック" pitchFamily="34" charset="-122"/>
+                <a:cs typeface="游ゴシック" pitchFamily="34" charset="-120"/>
               </a:rPr>
               <a:t>4つの核心機能</a:t>
             </a:r>
@@ -3144,9 +3168,9 @@
                 <a:solidFill>
                   <a:srgbClr val="1C2126"/>
                 </a:solidFill>
-                <a:latin typeface="Calibri" pitchFamily="34" charset="0"/>
-                <a:ea typeface="Calibri" pitchFamily="34" charset="-122"/>
-                <a:cs typeface="Calibri" pitchFamily="34" charset="-120"/>
+                <a:latin typeface="游ゴシック" pitchFamily="34" charset="0"/>
+                <a:ea typeface="游ゴシック" pitchFamily="34" charset="-122"/>
+                <a:cs typeface="游ゴシック" pitchFamily="34" charset="-120"/>
               </a:rPr>
               <a:t>危険エリアの可視化</a:t>
             </a:r>
@@ -3186,9 +3210,9 @@
                 <a:solidFill>
                   <a:srgbClr val="4B545C"/>
                 </a:solidFill>
-                <a:latin typeface="Calibri" pitchFamily="34" charset="0"/>
-                <a:ea typeface="Calibri" pitchFamily="34" charset="-122"/>
-                <a:cs typeface="Calibri" pitchFamily="34" charset="-120"/>
+                <a:latin typeface="游ゴシック" pitchFamily="34" charset="0"/>
+                <a:ea typeface="游ゴシック" pitchFamily="34" charset="-122"/>
+                <a:cs typeface="游ゴシック" pitchFamily="34" charset="-120"/>
               </a:rPr>
               <a:t>東京都の土砂災害警戒区域データを地図上に色分け表示</a:t>
             </a:r>
@@ -3290,9 +3314,9 @@
                 <a:solidFill>
                   <a:srgbClr val="1C2126"/>
                 </a:solidFill>
-                <a:latin typeface="Calibri" pitchFamily="34" charset="0"/>
-                <a:ea typeface="Calibri" pitchFamily="34" charset="-122"/>
-                <a:cs typeface="Calibri" pitchFamily="34" charset="-120"/>
+                <a:latin typeface="游ゴシック" pitchFamily="34" charset="0"/>
+                <a:ea typeface="游ゴシック" pitchFamily="34" charset="-122"/>
+                <a:cs typeface="游ゴシック" pitchFamily="34" charset="-120"/>
               </a:rPr>
               <a:t>事前問診フォーム</a:t>
             </a:r>
@@ -3332,9 +3356,9 @@
                 <a:solidFill>
                   <a:srgbClr val="4B545C"/>
                 </a:solidFill>
-                <a:latin typeface="Calibri" pitchFamily="34" charset="0"/>
-                <a:ea typeface="Calibri" pitchFamily="34" charset="-122"/>
-                <a:cs typeface="Calibri" pitchFamily="34" charset="-120"/>
+                <a:latin typeface="游ゴシック" pitchFamily="34" charset="0"/>
+                <a:ea typeface="游ゴシック" pitchFamily="34" charset="-122"/>
+                <a:cs typeface="游ゴシック" pitchFamily="34" charset="-120"/>
               </a:rPr>
               <a:t>行方不明者情報を家族が事前入力。音声ガイドで一問一答入力も可能</a:t>
             </a:r>
@@ -3436,9 +3460,9 @@
                 <a:solidFill>
                   <a:srgbClr val="1C2126"/>
                 </a:solidFill>
-                <a:latin typeface="Calibri" pitchFamily="34" charset="0"/>
-                <a:ea typeface="Calibri" pitchFamily="34" charset="-122"/>
-                <a:cs typeface="Calibri" pitchFamily="34" charset="-120"/>
+                <a:latin typeface="游ゴシック" pitchFamily="34" charset="0"/>
+                <a:ea typeface="游ゴシック" pitchFamily="34" charset="-122"/>
+                <a:cs typeface="游ゴシック" pitchFamily="34" charset="-120"/>
               </a:rPr>
               <a:t>間取り 手書き共有</a:t>
             </a:r>
@@ -3478,9 +3502,9 @@
                 <a:solidFill>
                   <a:srgbClr val="4B545C"/>
                 </a:solidFill>
-                <a:latin typeface="Calibri" pitchFamily="34" charset="0"/>
-                <a:ea typeface="Calibri" pitchFamily="34" charset="-122"/>
-                <a:cs typeface="Calibri" pitchFamily="34" charset="-120"/>
+                <a:latin typeface="游ゴシック" pitchFamily="34" charset="0"/>
+                <a:ea typeface="游ゴシック" pitchFamily="34" charset="-122"/>
+                <a:cs typeface="游ゴシック" pitchFamily="34" charset="-120"/>
               </a:rPr>
               <a:t>救助隊員に聞かれる前に、簡易な間取り図を描いて先回りで共有</a:t>
             </a:r>
@@ -3582,9 +3606,9 @@
                 <a:solidFill>
                   <a:srgbClr val="1C2126"/>
                 </a:solidFill>
-                <a:latin typeface="Calibri" pitchFamily="34" charset="0"/>
-                <a:ea typeface="Calibri" pitchFamily="34" charset="-122"/>
-                <a:cs typeface="Calibri" pitchFamily="34" charset="-120"/>
+                <a:latin typeface="游ゴシック" pitchFamily="34" charset="0"/>
+                <a:ea typeface="游ゴシック" pitchFamily="34" charset="-122"/>
+                <a:cs typeface="游ゴシック" pitchFamily="34" charset="-120"/>
               </a:rPr>
               <a:t>前兆現象の共有</a:t>
             </a:r>
@@ -3624,9 +3648,9 @@
                 <a:solidFill>
                   <a:srgbClr val="4B545C"/>
                 </a:solidFill>
-                <a:latin typeface="Calibri" pitchFamily="34" charset="0"/>
-                <a:ea typeface="Calibri" pitchFamily="34" charset="-122"/>
-                <a:cs typeface="Calibri" pitchFamily="34" charset="-120"/>
+                <a:latin typeface="游ゴシック" pitchFamily="34" charset="0"/>
+                <a:ea typeface="游ゴシック" pitchFamily="34" charset="-122"/>
+                <a:cs typeface="游ゴシック" pitchFamily="34" charset="-120"/>
               </a:rPr>
               <a:t>公式チェックリストに基づく目撃情報をワンタップで共有</a:t>
             </a:r>
@@ -3643,7 +3667,7 @@
         <p:spPr>
           <a:xfrm>
             <a:off x="6263640" y="1828800"/>
-            <a:ext cx="5120640" cy="4526280"/>
+            <a:ext cx="5820000" cy="4240000"/>
           </a:xfrm>
           <a:prstGeom prst="roundRect">
             <a:avLst>
@@ -3688,8 +3712,8 @@
         </p:blipFill>
         <p:spPr>
           <a:xfrm>
-            <a:off x="6446520" y="2011680"/>
-            <a:ext cx="4754880" cy="2674620"/>
+            <a:off x="6293640" y="1858800"/>
+            <a:ext cx="5760000" cy="3240000"/>
           </a:xfrm>
           <a:prstGeom prst="rect">
             <a:avLst/>
@@ -3704,8 +3728,8 @@
         </p:nvSpPr>
         <p:spPr>
           <a:xfrm>
-            <a:off x="6446520" y="4754880"/>
-            <a:ext cx="4754880" cy="365760"/>
+            <a:off x="6293640" y="5138800"/>
+            <a:ext cx="5760000" cy="280000"/>
           </a:xfrm>
           <a:prstGeom prst="rect">
             <a:avLst/>
@@ -3725,9 +3749,9 @@
                 <a:solidFill>
                   <a:srgbClr val="4B545C"/>
                 </a:solidFill>
-                <a:latin typeface="Calibri" pitchFamily="34" charset="0"/>
-                <a:ea typeface="Calibri" pitchFamily="34" charset="-122"/>
-                <a:cs typeface="Calibri" pitchFamily="34" charset="-120"/>
+                <a:latin typeface="游ゴシック" pitchFamily="34" charset="0"/>
+                <a:ea typeface="游ゴシック" pitchFamily="34" charset="-122"/>
+                <a:cs typeface="游ゴシック" pitchFamily="34" charset="-120"/>
               </a:rPr>
               <a:t>画面例：家の間取り 手書き共有</a:t>
             </a:r>
@@ -3743,8 +3767,8 @@
         </p:nvSpPr>
         <p:spPr>
           <a:xfrm>
-            <a:off x="6446520" y="5166360"/>
-            <a:ext cx="4754880" cy="1005840"/>
+            <a:off x="6293640" y="5438800"/>
+            <a:ext cx="5760000" cy="600000"/>
           </a:xfrm>
           <a:prstGeom prst="rect">
             <a:avLst/>
@@ -3767,9 +3791,9 @@
                 <a:solidFill>
                   <a:srgbClr val="1C2126"/>
                 </a:solidFill>
-                <a:latin typeface="Calibri" pitchFamily="34" charset="0"/>
-                <a:ea typeface="Calibri" pitchFamily="34" charset="-122"/>
-                <a:cs typeface="Calibri" pitchFamily="34" charset="-120"/>
+                <a:latin typeface="游ゴシック" pitchFamily="34" charset="0"/>
+                <a:ea typeface="游ゴシック" pitchFamily="34" charset="-122"/>
+                <a:cs typeface="游ゴシック" pitchFamily="34" charset="-120"/>
               </a:rPr>
               <a:t>手が震えて文字入力が難しい状況でも、なぞって描くだけで伝えられる。</a:t>
             </a:r>
@@ -3838,9 +3862,9 @@
                 <a:solidFill>
                   <a:srgbClr val="1F4E4A"/>
                 </a:solidFill>
-                <a:latin typeface="Cambria" pitchFamily="34" charset="0"/>
-                <a:ea typeface="Cambria" pitchFamily="34" charset="-122"/>
-                <a:cs typeface="Cambria" pitchFamily="34" charset="-120"/>
+                <a:latin typeface="游ゴシック" pitchFamily="34" charset="0"/>
+                <a:ea typeface="游ゴシック" pitchFamily="34" charset="-122"/>
+                <a:cs typeface="游ゴシック" pitchFamily="34" charset="-120"/>
               </a:rPr>
               <a:t>プロダクト</a:t>
             </a:r>
@@ -3877,9 +3901,9 @@
                 <a:solidFill>
                   <a:srgbClr val="4B545C"/>
                 </a:solidFill>
-                <a:latin typeface="Calibri" pitchFamily="34" charset="0"/>
-                <a:ea typeface="Calibri" pitchFamily="34" charset="-122"/>
-                <a:cs typeface="Calibri" pitchFamily="34" charset="-120"/>
+                <a:latin typeface="游ゴシック" pitchFamily="34" charset="0"/>
+                <a:ea typeface="游ゴシック" pitchFamily="34" charset="-122"/>
+                <a:cs typeface="游ゴシック" pitchFamily="34" charset="-120"/>
               </a:rPr>
               <a:t>危機感を伝えるUXと、そっと寄り添うAI</a:t>
             </a:r>
@@ -3895,8 +3919,8 @@
         </p:nvSpPr>
         <p:spPr>
           <a:xfrm>
-            <a:off x="822960" y="1874520"/>
-            <a:ext cx="5212080" cy="4160520"/>
+            <a:off x="400000" y="1874520"/>
+            <a:ext cx="5596000" cy="4114000"/>
           </a:xfrm>
           <a:prstGeom prst="roundRect">
             <a:avLst>
@@ -3941,8 +3965,8 @@
         </p:blipFill>
         <p:spPr>
           <a:xfrm>
-            <a:off x="1005840" y="2057400"/>
-            <a:ext cx="4846320" cy="2725826"/>
+            <a:off x="430000" y="1904520"/>
+            <a:ext cx="5536000" cy="3114000"/>
           </a:xfrm>
           <a:prstGeom prst="rect">
             <a:avLst/>
@@ -3957,8 +3981,8 @@
         </p:nvSpPr>
         <p:spPr>
           <a:xfrm>
-            <a:off x="1005840" y="4828032"/>
-            <a:ext cx="4846320" cy="365760"/>
+            <a:off x="430000" y="5058520"/>
+            <a:ext cx="5536000" cy="280000"/>
           </a:xfrm>
           <a:prstGeom prst="rect">
             <a:avLst/>
@@ -3978,9 +4002,9 @@
                 <a:solidFill>
                   <a:srgbClr val="B3352A"/>
                 </a:solidFill>
-                <a:latin typeface="Calibri" pitchFamily="34" charset="0"/>
-                <a:ea typeface="Calibri" pitchFamily="34" charset="-122"/>
-                <a:cs typeface="Calibri" pitchFamily="34" charset="-120"/>
+                <a:latin typeface="游ゴシック" pitchFamily="34" charset="0"/>
+                <a:ea typeface="游ゴシック" pitchFamily="34" charset="-122"/>
+                <a:cs typeface="游ゴシック" pitchFamily="34" charset="-120"/>
               </a:rPr>
               <a:t>「〇〇さんの近くで報告：山鳴り・地鳴り」</a:t>
             </a:r>
@@ -3996,8 +4020,8 @@
         </p:nvSpPr>
         <p:spPr>
           <a:xfrm>
-            <a:off x="1005840" y="5212080"/>
-            <a:ext cx="4846320" cy="731520"/>
+            <a:off x="430000" y="5358520"/>
+            <a:ext cx="5536000" cy="600000"/>
           </a:xfrm>
           <a:prstGeom prst="rect">
             <a:avLst/>
@@ -4020,9 +4044,9 @@
                 <a:solidFill>
                   <a:srgbClr val="4B545C"/>
                 </a:solidFill>
-                <a:latin typeface="Calibri" pitchFamily="34" charset="0"/>
-                <a:ea typeface="Calibri" pitchFamily="34" charset="-122"/>
-                <a:cs typeface="Calibri" pitchFamily="34" charset="-120"/>
+                <a:latin typeface="游ゴシック" pitchFamily="34" charset="0"/>
+                <a:ea typeface="游ゴシック" pitchFamily="34" charset="-122"/>
+                <a:cs typeface="游ゴシック" pitchFamily="34" charset="-120"/>
               </a:rPr>
               <a:t>正常性バイアス対策として、具体的な人・場所を名指しする呼びかけ形式で通知。</a:t>
             </a:r>
@@ -4038,8 +4062,8 @@
         </p:nvSpPr>
         <p:spPr>
           <a:xfrm>
-            <a:off x="6263640" y="1874520"/>
-            <a:ext cx="5120640" cy="4160520"/>
+            <a:off x="6196000" y="1874520"/>
+            <a:ext cx="5596000" cy="4114000"/>
           </a:xfrm>
           <a:prstGeom prst="roundRect">
             <a:avLst>
@@ -4084,8 +4108,8 @@
         </p:blipFill>
         <p:spPr>
           <a:xfrm>
-            <a:off x="6446520" y="2057400"/>
-            <a:ext cx="4754880" cy="2674620"/>
+            <a:off x="6226000" y="1904520"/>
+            <a:ext cx="5536000" cy="3114000"/>
           </a:xfrm>
           <a:prstGeom prst="rect">
             <a:avLst/>
@@ -4100,8 +4124,8 @@
         </p:nvSpPr>
         <p:spPr>
           <a:xfrm>
-            <a:off x="6446520" y="4828032"/>
-            <a:ext cx="4754880" cy="365760"/>
+            <a:off x="6226000" y="5058520"/>
+            <a:ext cx="5536000" cy="280000"/>
           </a:xfrm>
           <a:prstGeom prst="rect">
             <a:avLst/>
@@ -4121,9 +4145,9 @@
                 <a:solidFill>
                   <a:srgbClr val="1F4E4A"/>
                 </a:solidFill>
-                <a:latin typeface="Calibri" pitchFamily="34" charset="0"/>
-                <a:ea typeface="Calibri" pitchFamily="34" charset="-122"/>
-                <a:cs typeface="Calibri" pitchFamily="34" charset="-120"/>
+                <a:latin typeface="游ゴシック" pitchFamily="34" charset="0"/>
+                <a:ea typeface="游ゴシック" pitchFamily="34" charset="-122"/>
+                <a:cs typeface="游ゴシック" pitchFamily="34" charset="-120"/>
               </a:rPr>
               <a:t>💬 AI相談（傾聴AIチャット）</a:t>
             </a:r>
@@ -4139,8 +4163,8 @@
         </p:nvSpPr>
         <p:spPr>
           <a:xfrm>
-            <a:off x="6446520" y="5212080"/>
-            <a:ext cx="4754880" cy="731520"/>
+            <a:off x="6226000" y="5358520"/>
+            <a:ext cx="5536000" cy="600000"/>
           </a:xfrm>
           <a:prstGeom prst="rect">
             <a:avLst/>
@@ -4163,9 +4187,9 @@
                 <a:solidFill>
                   <a:srgbClr val="4B545C"/>
                 </a:solidFill>
-                <a:latin typeface="Calibri" pitchFamily="34" charset="0"/>
-                <a:ea typeface="Calibri" pitchFamily="34" charset="-122"/>
-                <a:cs typeface="Calibri" pitchFamily="34" charset="-120"/>
+                <a:latin typeface="游ゴシック" pitchFamily="34" charset="0"/>
+                <a:ea typeface="游ゴシック" pitchFamily="34" charset="-122"/>
+                <a:cs typeface="游ゴシック" pitchFamily="34" charset="-120"/>
               </a:rPr>
               <a:t>専門家のいない現場で、不安な気持ちに寄り添うAI。助言・予測は一切せず、深刻な兆候は専門窓口へ橋渡しする安全設計。</a:t>
             </a:r>
@@ -4234,9 +4258,9 @@
                 <a:solidFill>
                   <a:srgbClr val="FFFFFF"/>
                 </a:solidFill>
-                <a:latin typeface="Cambria" pitchFamily="34" charset="0"/>
-                <a:ea typeface="Cambria" pitchFamily="34" charset="-122"/>
-                <a:cs typeface="Cambria" pitchFamily="34" charset="-120"/>
+                <a:latin typeface="游ゴシック" pitchFamily="34" charset="0"/>
+                <a:ea typeface="游ゴシック" pitchFamily="34" charset="-122"/>
+                <a:cs typeface="游ゴシック" pitchFamily="34" charset="-120"/>
               </a:rPr>
               <a:t>デモ</a:t>
             </a:r>
@@ -4273,9 +4297,9 @@
                 <a:solidFill>
                   <a:srgbClr val="9FC7BC"/>
                 </a:solidFill>
-                <a:latin typeface="Calibri" pitchFamily="34" charset="0"/>
-                <a:ea typeface="Calibri" pitchFamily="34" charset="-122"/>
-                <a:cs typeface="Calibri" pitchFamily="34" charset="-120"/>
+                <a:latin typeface="游ゴシック" pitchFamily="34" charset="0"/>
+                <a:ea typeface="游ゴシック" pitchFamily="34" charset="-122"/>
+                <a:cs typeface="游ゴシック" pitchFamily="34" charset="-120"/>
               </a:rPr>
               <a:t>実際の画面操作</a:t>
             </a:r>
@@ -4312,9 +4336,9 @@
                 <a:solidFill>
                   <a:srgbClr val="9FC7BC"/>
                 </a:solidFill>
-                <a:latin typeface="Calibri" pitchFamily="34" charset="0"/>
-                <a:ea typeface="Calibri" pitchFamily="34" charset="-122"/>
-                <a:cs typeface="Calibri" pitchFamily="34" charset="-120"/>
+                <a:latin typeface="游ゴシック" pitchFamily="34" charset="0"/>
+                <a:ea typeface="游ゴシック" pitchFamily="34" charset="-122"/>
+                <a:cs typeface="游ゴシック" pitchFamily="34" charset="-120"/>
               </a:rPr>
               <a:t>▶ クリックで再生（無音・約17秒）</a:t>
             </a:r>
@@ -4347,8 +4371,8 @@
         </p:blipFill>
         <p:spPr>
           <a:xfrm>
-            <a:off x="2596000" y="1750000"/>
-            <a:ext cx="7000000" cy="3937500"/>
+            <a:off x="2096000" y="1700000"/>
+            <a:ext cx="8000000" cy="4500000"/>
           </a:xfrm>
           <a:prstGeom prst="rect">
             <a:avLst/>
@@ -4438,9 +4462,9 @@
                 <a:solidFill>
                   <a:srgbClr val="1F4E4A"/>
                 </a:solidFill>
-                <a:latin typeface="Cambria" pitchFamily="34" charset="0"/>
-                <a:ea typeface="Cambria" pitchFamily="34" charset="-122"/>
-                <a:cs typeface="Cambria" pitchFamily="34" charset="-120"/>
+                <a:latin typeface="游ゴシック" pitchFamily="34" charset="0"/>
+                <a:ea typeface="游ゴシック" pitchFamily="34" charset="-122"/>
+                <a:cs typeface="游ゴシック" pitchFamily="34" charset="-120"/>
               </a:rPr>
               <a:t>利用オープンデータ</a:t>
             </a:r>
@@ -4488,16 +4512,16 @@
                           <a:solidFill>
                             <a:srgbClr val="FFFFFF"/>
                           </a:solidFill>
-                          <a:latin typeface="Calibri" pitchFamily="34" charset="0"/>
-                          <a:ea typeface="Calibri" pitchFamily="34" charset="-122"/>
-                          <a:cs typeface="Calibri" pitchFamily="34" charset="-120"/>
+                          <a:latin typeface="游ゴシック" pitchFamily="34" charset="0"/>
+                          <a:ea typeface="游ゴシック" pitchFamily="34" charset="-122"/>
+                          <a:cs typeface="游ゴシック" pitchFamily="34" charset="-120"/>
                         </a:rPr>
                         <a:t>データ名</a:t>
                       </a:r>
                       <a:endParaRPr lang="en-US" sz="1300" dirty="0">
-                        <a:latin typeface="Calibri" charset="0"/>
-                        <a:ea typeface="Calibri" charset="0"/>
-                        <a:cs typeface="Calibri" charset="0"/>
+                        <a:latin typeface="游ゴシック" charset="0"/>
+                        <a:ea typeface="游ゴシック" charset="0"/>
+                        <a:cs typeface="游ゴシック" charset="0"/>
                       </a:endParaRPr>
                     </a:p>
                   </a:txBody>
@@ -4556,16 +4580,16 @@
                           <a:solidFill>
                             <a:srgbClr val="FFFFFF"/>
                           </a:solidFill>
-                          <a:latin typeface="Calibri" pitchFamily="34" charset="0"/>
-                          <a:ea typeface="Calibri" pitchFamily="34" charset="-122"/>
-                          <a:cs typeface="Calibri" pitchFamily="34" charset="-120"/>
+                          <a:latin typeface="游ゴシック" pitchFamily="34" charset="0"/>
+                          <a:ea typeface="游ゴシック" pitchFamily="34" charset="-122"/>
+                          <a:cs typeface="游ゴシック" pitchFamily="34" charset="-120"/>
                         </a:rPr>
                         <a:t>用途</a:t>
                       </a:r>
                       <a:endParaRPr lang="en-US" sz="1300" dirty="0">
-                        <a:latin typeface="Calibri" charset="0"/>
-                        <a:ea typeface="Calibri" charset="0"/>
-                        <a:cs typeface="Calibri" charset="0"/>
+                        <a:latin typeface="游ゴシック" charset="0"/>
+                        <a:ea typeface="游ゴシック" charset="0"/>
+                        <a:cs typeface="游ゴシック" charset="0"/>
                       </a:endParaRPr>
                     </a:p>
                   </a:txBody>
@@ -4626,16 +4650,16 @@
                           <a:solidFill>
                             <a:srgbClr val="1C2126"/>
                           </a:solidFill>
-                          <a:latin typeface="Calibri" pitchFamily="34" charset="0"/>
-                          <a:ea typeface="Calibri" pitchFamily="34" charset="-122"/>
-                          <a:cs typeface="Calibri" pitchFamily="34" charset="-120"/>
+                          <a:latin typeface="游ゴシック" pitchFamily="34" charset="0"/>
+                          <a:ea typeface="游ゴシック" pitchFamily="34" charset="-122"/>
+                          <a:cs typeface="游ゴシック" pitchFamily="34" charset="-120"/>
                         </a:rPr>
                         <a:t>東京都建設局河川部「東京都土砂災害危険度情報関連データ」（CC BY 4.0）</a:t>
                       </a:r>
                       <a:endParaRPr lang="en-US" sz="1300" dirty="0">
-                        <a:latin typeface="Calibri" charset="0"/>
-                        <a:ea typeface="Calibri" charset="0"/>
-                        <a:cs typeface="Calibri" charset="0"/>
+                        <a:latin typeface="游ゴシック" charset="0"/>
+                        <a:ea typeface="游ゴシック" charset="0"/>
+                        <a:cs typeface="游ゴシック" charset="0"/>
                       </a:endParaRPr>
                     </a:p>
                   </a:txBody>
@@ -4694,16 +4718,16 @@
                           <a:solidFill>
                             <a:srgbClr val="4B545C"/>
                           </a:solidFill>
-                          <a:latin typeface="Calibri" pitchFamily="34" charset="0"/>
-                          <a:ea typeface="Calibri" pitchFamily="34" charset="-122"/>
-                          <a:cs typeface="Calibri" pitchFamily="34" charset="-120"/>
+                          <a:latin typeface="游ゴシック" pitchFamily="34" charset="0"/>
+                          <a:ea typeface="游ゴシック" pitchFamily="34" charset="-122"/>
+                          <a:cs typeface="游ゴシック" pitchFamily="34" charset="-120"/>
                         </a:rPr>
                         <a:t>危険エリアの地図表示（区域データ本体を使用）</a:t>
                       </a:r>
                       <a:endParaRPr lang="en-US" sz="1300" dirty="0">
-                        <a:latin typeface="Calibri" charset="0"/>
-                        <a:ea typeface="Calibri" charset="0"/>
-                        <a:cs typeface="Calibri" charset="0"/>
+                        <a:latin typeface="游ゴシック" charset="0"/>
+                        <a:ea typeface="游ゴシック" charset="0"/>
+                        <a:cs typeface="游ゴシック" charset="0"/>
                       </a:endParaRPr>
                     </a:p>
                   </a:txBody>
@@ -4764,16 +4788,16 @@
                           <a:solidFill>
                             <a:srgbClr val="1C2126"/>
                           </a:solidFill>
-                          <a:latin typeface="Calibri" pitchFamily="34" charset="0"/>
-                          <a:ea typeface="Calibri" pitchFamily="34" charset="-122"/>
-                          <a:cs typeface="Calibri" pitchFamily="34" charset="-120"/>
+                          <a:latin typeface="游ゴシック" pitchFamily="34" charset="0"/>
+                          <a:ea typeface="游ゴシック" pitchFamily="34" charset="-122"/>
+                          <a:cs typeface="游ゴシック" pitchFamily="34" charset="-120"/>
                         </a:rPr>
                         <a:t>東京都「土砂災害警戒区域等マップ」</a:t>
                       </a:r>
                       <a:endParaRPr lang="en-US" sz="1300" dirty="0">
-                        <a:latin typeface="Calibri" charset="0"/>
-                        <a:ea typeface="Calibri" charset="0"/>
-                        <a:cs typeface="Calibri" charset="0"/>
+                        <a:latin typeface="游ゴシック" charset="0"/>
+                        <a:ea typeface="游ゴシック" charset="0"/>
+                        <a:cs typeface="游ゴシック" charset="0"/>
                       </a:endParaRPr>
                     </a:p>
                   </a:txBody>
@@ -4832,16 +4856,16 @@
                           <a:solidFill>
                             <a:srgbClr val="4B545C"/>
                           </a:solidFill>
-                          <a:latin typeface="Calibri" pitchFamily="34" charset="0"/>
-                          <a:ea typeface="Calibri" pitchFamily="34" charset="-122"/>
-                          <a:cs typeface="Calibri" pitchFamily="34" charset="-120"/>
+                          <a:latin typeface="游ゴシック" pitchFamily="34" charset="0"/>
+                          <a:ea typeface="游ゴシック" pitchFamily="34" charset="-122"/>
+                          <a:cs typeface="游ゴシック" pitchFamily="34" charset="-120"/>
                         </a:rPr>
                         <a:t>最新の指定状況への参照リンク</a:t>
                       </a:r>
                       <a:endParaRPr lang="en-US" sz="1300" dirty="0">
-                        <a:latin typeface="Calibri" charset="0"/>
-                        <a:ea typeface="Calibri" charset="0"/>
-                        <a:cs typeface="Calibri" charset="0"/>
+                        <a:latin typeface="游ゴシック" charset="0"/>
+                        <a:ea typeface="游ゴシック" charset="0"/>
+                        <a:cs typeface="游ゴシック" charset="0"/>
                       </a:endParaRPr>
                     </a:p>
                   </a:txBody>
@@ -4902,16 +4926,16 @@
                           <a:solidFill>
                             <a:srgbClr val="1C2126"/>
                           </a:solidFill>
-                          <a:latin typeface="Calibri" pitchFamily="34" charset="0"/>
-                          <a:ea typeface="Calibri" pitchFamily="34" charset="-122"/>
-                          <a:cs typeface="Calibri" pitchFamily="34" charset="-120"/>
+                          <a:latin typeface="游ゴシック" pitchFamily="34" charset="0"/>
+                          <a:ea typeface="游ゴシック" pitchFamily="34" charset="-122"/>
+                          <a:cs typeface="游ゴシック" pitchFamily="34" charset="-120"/>
                         </a:rPr>
                         <a:t>首相官邸「土砂災害」防災情報ページ</a:t>
                       </a:r>
                       <a:endParaRPr lang="en-US" sz="1300" dirty="0">
-                        <a:latin typeface="Calibri" charset="0"/>
-                        <a:ea typeface="Calibri" charset="0"/>
-                        <a:cs typeface="Calibri" charset="0"/>
+                        <a:latin typeface="游ゴシック" charset="0"/>
+                        <a:ea typeface="游ゴシック" charset="0"/>
+                        <a:cs typeface="游ゴシック" charset="0"/>
                       </a:endParaRPr>
                     </a:p>
                   </a:txBody>
@@ -4970,16 +4994,16 @@
                           <a:solidFill>
                             <a:srgbClr val="4B545C"/>
                           </a:solidFill>
-                          <a:latin typeface="Calibri" pitchFamily="34" charset="0"/>
-                          <a:ea typeface="Calibri" pitchFamily="34" charset="-122"/>
-                          <a:cs typeface="Calibri" pitchFamily="34" charset="-120"/>
+                          <a:latin typeface="游ゴシック" pitchFamily="34" charset="0"/>
+                          <a:ea typeface="游ゴシック" pitchFamily="34" charset="-122"/>
+                          <a:cs typeface="游ゴシック" pitchFamily="34" charset="-120"/>
                         </a:rPr>
                         <a:t>過去の災害事例（参考情報）・前兆現象チェックリストの出典</a:t>
                       </a:r>
                       <a:endParaRPr lang="en-US" sz="1300" dirty="0">
-                        <a:latin typeface="Calibri" charset="0"/>
-                        <a:ea typeface="Calibri" charset="0"/>
-                        <a:cs typeface="Calibri" charset="0"/>
+                        <a:latin typeface="游ゴシック" charset="0"/>
+                        <a:ea typeface="游ゴシック" charset="0"/>
+                        <a:cs typeface="游ゴシック" charset="0"/>
                       </a:endParaRPr>
                     </a:p>
                   </a:txBody>
@@ -5091,9 +5115,9 @@
                 <a:solidFill>
                   <a:srgbClr val="FFFFFF"/>
                 </a:solidFill>
-                <a:latin typeface="Cambria" pitchFamily="34" charset="0"/>
-                <a:ea typeface="Cambria" pitchFamily="34" charset="-122"/>
-                <a:cs typeface="Cambria" pitchFamily="34" charset="-120"/>
+                <a:latin typeface="游ゴシック" pitchFamily="34" charset="0"/>
+                <a:ea typeface="游ゴシック" pitchFamily="34" charset="-122"/>
+                <a:cs typeface="游ゴシック" pitchFamily="34" charset="-120"/>
               </a:rPr>
               <a:t>チーム紹介</a:t>
             </a:r>
@@ -5150,9 +5174,9 @@
                 <a:solidFill>
                   <a:srgbClr val="1F4E4A"/>
                 </a:solidFill>
-                <a:latin typeface="Cambria" pitchFamily="34" charset="0"/>
-                <a:ea typeface="Cambria" pitchFamily="34" charset="-122"/>
-                <a:cs typeface="Cambria" pitchFamily="34" charset="-120"/>
+                <a:latin typeface="游ゴシック" pitchFamily="34" charset="0"/>
+                <a:ea typeface="游ゴシック" pitchFamily="34" charset="-122"/>
+                <a:cs typeface="游ゴシック" pitchFamily="34" charset="-120"/>
               </a:rPr>
               <a:t>結</a:t>
             </a:r>
@@ -5189,9 +5213,9 @@
                 <a:solidFill>
                   <a:srgbClr val="FFFFFF"/>
                 </a:solidFill>
-                <a:latin typeface="Calibri" pitchFamily="34" charset="0"/>
-                <a:ea typeface="Calibri" pitchFamily="34" charset="-122"/>
-                <a:cs typeface="Calibri" pitchFamily="34" charset="-120"/>
+                <a:latin typeface="游ゴシック" pitchFamily="34" charset="0"/>
+                <a:ea typeface="游ゴシック" pitchFamily="34" charset="-122"/>
+                <a:cs typeface="游ゴシック" pitchFamily="34" charset="-120"/>
               </a:rPr>
               <a:t>チーム「結」（個人開発）</a:t>
             </a:r>
@@ -5231,9 +5255,9 @@
                 <a:solidFill>
                   <a:srgbClr val="E4EFEA"/>
                 </a:solidFill>
-                <a:latin typeface="Calibri" pitchFamily="34" charset="0"/>
-                <a:ea typeface="Calibri" pitchFamily="34" charset="-122"/>
-                <a:cs typeface="Calibri" pitchFamily="34" charset="-120"/>
+                <a:latin typeface="游ゴシック" pitchFamily="34" charset="0"/>
+                <a:ea typeface="游ゴシック" pitchFamily="34" charset="-122"/>
+                <a:cs typeface="游ゴシック" pitchFamily="34" charset="-120"/>
               </a:rPr>
               <a:t>土砂災害の現場に居合わせ、家族として何もできずただ待つしかなかった実体験から、</a:t>
             </a:r>
@@ -5251,9 +5275,9 @@
                 <a:solidFill>
                   <a:srgbClr val="E4EFEA"/>
                 </a:solidFill>
-                <a:latin typeface="Calibri" pitchFamily="34" charset="0"/>
-                <a:ea typeface="Calibri" pitchFamily="34" charset="-122"/>
-                <a:cs typeface="Calibri" pitchFamily="34" charset="-120"/>
+                <a:latin typeface="游ゴシック" pitchFamily="34" charset="0"/>
+                <a:ea typeface="游ゴシック" pitchFamily="34" charset="-122"/>
+                <a:cs typeface="游ゴシック" pitchFamily="34" charset="-120"/>
               </a:rPr>
               <a:t>企画・設計・実装まで一人で開発。</a:t>
             </a:r>
@@ -5319,9 +5343,9 @@
                 <a:solidFill>
                   <a:srgbClr val="FFFFFF"/>
                 </a:solidFill>
-                <a:latin typeface="Calibri" pitchFamily="34" charset="0"/>
-                <a:ea typeface="Calibri" pitchFamily="34" charset="-122"/>
-                <a:cs typeface="Calibri" pitchFamily="34" charset="-120"/>
+                <a:latin typeface="游ゴシック" pitchFamily="34" charset="0"/>
+                <a:ea typeface="游ゴシック" pitchFamily="34" charset="-122"/>
+                <a:cs typeface="游ゴシック" pitchFamily="34" charset="-120"/>
               </a:rPr>
               <a:t>🛡️ 安全設計へのこだわり</a:t>
             </a:r>
@@ -5365,9 +5389,9 @@
                 <a:solidFill>
                   <a:srgbClr val="E4EFEA"/>
                 </a:solidFill>
-                <a:latin typeface="Calibri" pitchFamily="34" charset="0"/>
-                <a:ea typeface="Calibri" pitchFamily="34" charset="-122"/>
-                <a:cs typeface="Calibri" pitchFamily="34" charset="-120"/>
+                <a:latin typeface="游ゴシック" pitchFamily="34" charset="0"/>
+                <a:ea typeface="游ゴシック" pitchFamily="34" charset="-122"/>
+                <a:cs typeface="游ゴシック" pitchFamily="34" charset="-120"/>
               </a:rPr>
               <a:t>生存確率・助かる見込み時間の提示はしない（AIチャットのシステムプロンプトで明示的に禁止）</a:t>
             </a:r>
@@ -5389,9 +5413,9 @@
                 <a:solidFill>
                   <a:srgbClr val="E4EFEA"/>
                 </a:solidFill>
-                <a:latin typeface="Calibri" pitchFamily="34" charset="0"/>
-                <a:ea typeface="Calibri" pitchFamily="34" charset="-122"/>
-                <a:cs typeface="Calibri" pitchFamily="34" charset="-120"/>
+                <a:latin typeface="游ゴシック" pitchFamily="34" charset="0"/>
+                <a:ea typeface="游ゴシック" pitchFamily="34" charset="-122"/>
+                <a:cs typeface="游ゴシック" pitchFamily="34" charset="-120"/>
               </a:rPr>
               <a:t>前兆現象は「予測」ではなく、公式チェックリストに基づく目撃情報の共有として扱う</a:t>
             </a:r>
@@ -5413,9 +5437,9 @@
                 <a:solidFill>
                   <a:srgbClr val="E4EFEA"/>
                 </a:solidFill>
-                <a:latin typeface="Calibri" pitchFamily="34" charset="0"/>
-                <a:ea typeface="Calibri" pitchFamily="34" charset="-122"/>
-                <a:cs typeface="Calibri" pitchFamily="34" charset="-120"/>
+                <a:latin typeface="游ゴシック" pitchFamily="34" charset="0"/>
+                <a:ea typeface="游ゴシック" pitchFamily="34" charset="-122"/>
+                <a:cs typeface="游ゴシック" pitchFamily="34" charset="-120"/>
               </a:rPr>
               <a:t>深刻な危機のサインは、AI任せにせずキーワード安全網で即座に専門相談窓口へ橋渡し</a:t>
             </a:r>
@@ -5452,9 +5476,9 @@
                 <a:solidFill>
                   <a:srgbClr val="9FC7BC"/>
                 </a:solidFill>
-                <a:latin typeface="Calibri" pitchFamily="34" charset="0"/>
-                <a:ea typeface="Calibri" pitchFamily="34" charset="-122"/>
-                <a:cs typeface="Calibri" pitchFamily="34" charset="-120"/>
+                <a:latin typeface="游ゴシック" pitchFamily="34" charset="0"/>
+                <a:ea typeface="游ゴシック" pitchFamily="34" charset="-122"/>
+                <a:cs typeface="游ゴシック" pitchFamily="34" charset="-120"/>
               </a:rPr>
               <a:t>結（ゆい） — 救助を後押しする、無料の情報共有アプリ</a:t>
             </a:r>
@@ -5513,7 +5537,7 @@
     </a:clrScheme>
     <a:fontScheme name="Office">
       <a:majorFont>
-        <a:latin typeface="Calibri Light" panose="020F0302020204030204"/>
+        <a:latin typeface="游ゴシック" panose="020F0302020204030204"/>
         <a:ea typeface=""/>
         <a:cs typeface=""/>
         <a:font script="Jpan" typeface="游ゴシック Light"/>
@@ -5565,7 +5589,7 @@
         <a:font script="Tfng" typeface="Ebrima"/>
       </a:majorFont>
       <a:minorFont>
-        <a:latin typeface="Calibri" panose="020F0502020204030204"/>
+        <a:latin typeface="游ゴシック" panose="020F0502020204030204"/>
         <a:ea typeface=""/>
         <a:cs typeface=""/>
         <a:font script="Jpan" typeface="游ゴシック"/>
